--- a/Documentos/Banner_FECAP_CCOMP5_RivoTrio.pptx
+++ b/Documentos/Banner_FECAP_CCOMP5_RivoTrio.pptx
@@ -14,18 +14,11 @@
   <p:notesSz cx="6858000" cy="9144000"/>
   <p:embeddedFontLst>
     <p:embeddedFont>
-      <p:font typeface="Calibri" panose="020F0502020204030204" pitchFamily="34" charset="0"/>
+      <p:font typeface="Open Sans" panose="020B0606030504020204" pitchFamily="34" charset="0"/>
       <p:regular r:id="rId4"/>
       <p:bold r:id="rId5"/>
       <p:italic r:id="rId6"/>
       <p:boldItalic r:id="rId7"/>
-    </p:embeddedFont>
-    <p:embeddedFont>
-      <p:font typeface="Open Sans" panose="020B0604020202020204" charset="0"/>
-      <p:regular r:id="rId8"/>
-      <p:bold r:id="rId9"/>
-      <p:italic r:id="rId10"/>
-      <p:boldItalic r:id="rId11"/>
     </p:embeddedFont>
   </p:embeddedFontLst>
   <p:defaultTextStyle>
@@ -273,7 +266,7 @@
       </p15:sldGuideLst>
     </p:ext>
     <p:ext uri="GoogleSlidesCustomDataVersion2">
-      <go:slidesCustomData xmlns="" xmlns:mc="http://schemas.openxmlformats.org/markup-compatibility/2006" xmlns:mv="urn:schemas-microsoft-com:mac:vml" xmlns:c="http://schemas.openxmlformats.org/drawingml/2006/chart" xmlns:dgm="http://schemas.openxmlformats.org/drawingml/2006/diagram" xmlns:o="urn:schemas-microsoft-com:office:office" xmlns:v="urn:schemas-microsoft-com:vml" xmlns:pvml="urn:schemas-microsoft-com:office:powerpoint" xmlns:com="http://schemas.openxmlformats.org/drawingml/2006/compatibility" xmlns:p14="http://schemas.microsoft.com/office/powerpoint/2010/main" xmlns:p15="http://schemas.microsoft.com/office/powerpoint/2012/main" xmlns:ahyp="http://schemas.microsoft.com/office/drawing/2018/hyperlinkcolor" xmlns:go="http://customooxmlschemas.google.com/" r:id="rId12" roundtripDataSignature="AMtx7miHexfJ4GjhJ20xDvwvs2ulWXUQ1A=="/>
+      <go:slidesCustomData xmlns:go="http://customooxmlschemas.google.com/" xmlns:ahyp="http://schemas.microsoft.com/office/drawing/2018/hyperlinkcolor" xmlns:p15="http://schemas.microsoft.com/office/powerpoint/2012/main" xmlns:p14="http://schemas.microsoft.com/office/powerpoint/2010/main" xmlns:com="http://schemas.openxmlformats.org/drawingml/2006/compatibility" xmlns:pvml="urn:schemas-microsoft-com:office:powerpoint" xmlns:v="urn:schemas-microsoft-com:vml" xmlns:o="urn:schemas-microsoft-com:office:office" xmlns:dgm="http://schemas.openxmlformats.org/drawingml/2006/diagram" xmlns:c="http://schemas.openxmlformats.org/drawingml/2006/chart" xmlns:mv="urn:schemas-microsoft-com:mac:vml" xmlns:mc="http://schemas.openxmlformats.org/markup-compatibility/2006" xmlns="" r:id="rId12" roundtripDataSignature="AMtx7miHexfJ4GjhJ20xDvwvs2ulWXUQ1A=="/>
     </p:ext>
   </p:extLst>
 </p:presentation>
@@ -16574,15 +16567,15 @@
               <a:buNone/>
             </a:pPr>
             <a:r>
-              <a:rPr lang="en-US" sz="11434" b="1">
+              <a:rPr lang="en-US" sz="11434" b="1" dirty="0">
                 <a:latin typeface="Open Sans"/>
                 <a:ea typeface="Open Sans"/>
                 <a:cs typeface="Open Sans"/>
                 <a:sym typeface="Open Sans"/>
               </a:rPr>
-              <a:t>TÉCNOLOGIAS EMPÁTICAS</a:t>
+              <a:t>TECNOLOGIAS EMPÁTICAS</a:t>
             </a:r>
-            <a:endParaRPr sz="1400" b="0" i="0" u="none" strike="noStrike" cap="none">
+            <a:endParaRPr sz="1400" b="0" i="0" u="none" strike="noStrike" cap="none" dirty="0">
               <a:solidFill>
                 <a:srgbClr val="000000"/>
               </a:solidFill>
@@ -17041,8 +17034,8 @@
         </p:nvSpPr>
         <p:spPr>
           <a:xfrm>
-            <a:off x="15966975" y="31719851"/>
-            <a:ext cx="11400000" cy="6441000"/>
+            <a:off x="15966975" y="31605551"/>
+            <a:ext cx="11400000" cy="5911875"/>
           </a:xfrm>
           <a:prstGeom prst="rect">
             <a:avLst/>
@@ -17058,92 +17051,96 @@
           </a:bodyPr>
           <a:lstStyle/>
           <a:p>
-            <a:pPr marL="0" marR="0" lvl="0" indent="0" algn="just" rtl="0">
+            <a:pPr marL="457200" lvl="0" indent="-457200" algn="just">
               <a:lnSpc>
                 <a:spcPct val="140000"/>
               </a:lnSpc>
-              <a:spcBef>
-                <a:spcPts val="0"/>
-              </a:spcBef>
-              <a:spcAft>
-                <a:spcPts val="0"/>
-              </a:spcAft>
-              <a:buClr>
-                <a:srgbClr val="000000"/>
-              </a:buClr>
               <a:buSzPts val="3430"/>
-              <a:buFont typeface="Arial"/>
-              <a:buNone/>
+              <a:buFont typeface="Arial" panose="020B0604020202020204" pitchFamily="34" charset="0"/>
+              <a:buChar char="•"/>
             </a:pPr>
             <a:r>
-              <a:rPr lang="en-US" sz="3430">
+              <a:rPr lang="en-US" sz="3430" dirty="0">
                 <a:latin typeface="Open Sans"/>
                 <a:ea typeface="Open Sans"/>
                 <a:cs typeface="Open Sans"/>
                 <a:sym typeface="Open Sans"/>
               </a:rPr>
-              <a:t>YOUTUBE, EDJE ELETRONICS. Computer Vision Explained Simply. Disponível em: https://www.youtube.com/watch?v=r0RspiLG260</a:t>
+              <a:t>SCIENCEDIRECT. Computer vision and machine learning approaches for inventory management optimization. Elsevier, 2024. </a:t>
             </a:r>
-            <a:endParaRPr sz="3430">
-              <a:latin typeface="Open Sans"/>
-              <a:ea typeface="Open Sans"/>
-              <a:cs typeface="Open Sans"/>
-              <a:sym typeface="Open Sans"/>
-            </a:endParaRPr>
-          </a:p>
-          <a:p>
-            <a:pPr marL="0" marR="0" lvl="0" indent="0" algn="just" rtl="0">
-              <a:lnSpc>
-                <a:spcPct val="140000"/>
-              </a:lnSpc>
-              <a:spcBef>
-                <a:spcPts val="0"/>
-              </a:spcBef>
-              <a:spcAft>
-                <a:spcPts val="0"/>
-              </a:spcAft>
-              <a:buClr>
-                <a:srgbClr val="000000"/>
-              </a:buClr>
-              <a:buSzPts val="3430"/>
-              <a:buFont typeface="Arial"/>
-              <a:buNone/>
-            </a:pPr>
             <a:r>
-              <a:rPr lang="en-US" sz="3430">
+              <a:rPr lang="en-US" sz="3430" dirty="0" err="1">
                 <a:latin typeface="Open Sans"/>
                 <a:ea typeface="Open Sans"/>
                 <a:cs typeface="Open Sans"/>
                 <a:sym typeface="Open Sans"/>
               </a:rPr>
-              <a:t>. Acesso em: 27 março 2026.</a:t>
+              <a:t>Disponível</a:t>
             </a:r>
-            <a:endParaRPr sz="3430">
-              <a:latin typeface="Open Sans"/>
-              <a:ea typeface="Open Sans"/>
-              <a:cs typeface="Open Sans"/>
-              <a:sym typeface="Open Sans"/>
-            </a:endParaRPr>
-          </a:p>
-          <a:p>
-            <a:pPr marL="0" marR="0" lvl="0" indent="0" algn="just" rtl="0">
-              <a:lnSpc>
-                <a:spcPct val="140000"/>
-              </a:lnSpc>
-              <a:spcBef>
-                <a:spcPts val="0"/>
-              </a:spcBef>
-              <a:spcAft>
-                <a:spcPts val="0"/>
-              </a:spcAft>
-              <a:buClr>
-                <a:srgbClr val="000000"/>
-              </a:buClr>
-              <a:buSzPts val="3430"/>
-              <a:buFont typeface="Arial"/>
-              <a:buNone/>
-            </a:pPr>
-            <a:endParaRPr sz="3430" b="0" i="0" u="none" strike="noStrike" cap="none">
+            <a:r>
+              <a:rPr lang="en-US" sz="3430" dirty="0">
+                <a:latin typeface="Open Sans"/>
+                <a:ea typeface="Open Sans"/>
+                <a:cs typeface="Open Sans"/>
+                <a:sym typeface="Open Sans"/>
+              </a:rPr>
+              <a:t> </a:t>
+            </a:r>
+            <a:r>
+              <a:rPr lang="en-US" sz="3430" dirty="0" err="1">
+                <a:latin typeface="Open Sans"/>
+                <a:ea typeface="Open Sans"/>
+                <a:cs typeface="Open Sans"/>
+                <a:sym typeface="Open Sans"/>
+              </a:rPr>
+              <a:t>em</a:t>
+            </a:r>
+            <a:r>
+              <a:rPr lang="en-US" sz="3430" dirty="0">
+                <a:latin typeface="Open Sans"/>
+                <a:ea typeface="Open Sans"/>
+                <a:cs typeface="Open Sans"/>
+                <a:sym typeface="Open Sans"/>
+              </a:rPr>
+              <a:t>: https://sl1nk.com/byznvly. Acesso </a:t>
+            </a:r>
+            <a:r>
+              <a:rPr lang="en-US" sz="3430" dirty="0" err="1">
+                <a:latin typeface="Open Sans"/>
+                <a:ea typeface="Open Sans"/>
+                <a:cs typeface="Open Sans"/>
+                <a:sym typeface="Open Sans"/>
+              </a:rPr>
+              <a:t>em</a:t>
+            </a:r>
+            <a:r>
+              <a:rPr lang="en-US" sz="3430" dirty="0">
+                <a:latin typeface="Open Sans"/>
+                <a:ea typeface="Open Sans"/>
+                <a:cs typeface="Open Sans"/>
+                <a:sym typeface="Open Sans"/>
+              </a:rPr>
+              <a:t>: 11 </a:t>
+            </a:r>
+            <a:r>
+              <a:rPr lang="en-US" sz="3430" dirty="0" err="1">
+                <a:latin typeface="Open Sans"/>
+                <a:ea typeface="Open Sans"/>
+                <a:cs typeface="Open Sans"/>
+                <a:sym typeface="Open Sans"/>
+              </a:rPr>
+              <a:t>maio</a:t>
+            </a:r>
+            <a:r>
+              <a:rPr lang="en-US" sz="3430" dirty="0">
+                <a:latin typeface="Open Sans"/>
+                <a:ea typeface="Open Sans"/>
+                <a:cs typeface="Open Sans"/>
+                <a:sym typeface="Open Sans"/>
+              </a:rPr>
+              <a:t> 2026.</a:t>
+            </a:r>
+            <a:endParaRPr sz="3430" b="0" i="0" u="none" strike="noStrike" cap="none" dirty="0">
               <a:solidFill>
                 <a:srgbClr val="000000"/>
               </a:solidFill>
@@ -17154,7 +17151,7 @@
             </a:endParaRPr>
           </a:p>
           <a:p>
-            <a:pPr marL="0" marR="0" lvl="0" indent="0" algn="just" rtl="0">
+            <a:pPr marL="457200" marR="0" lvl="0" indent="-457200" algn="just" rtl="0">
               <a:lnSpc>
                 <a:spcPct val="140000"/>
               </a:lnSpc>
@@ -17168,53 +17165,19 @@
                 <a:srgbClr val="000000"/>
               </a:buClr>
               <a:buSzPts val="3430"/>
-              <a:buFont typeface="Arial"/>
-              <a:buNone/>
+              <a:buFont typeface="Arial" panose="020B0604020202020204" pitchFamily="34" charset="0"/>
+              <a:buChar char="•"/>
             </a:pPr>
             <a:r>
-              <a:rPr lang="en-US" sz="3430">
+              <a:rPr lang="pt-BR" sz="3430" dirty="0">
                 <a:latin typeface="Open Sans"/>
                 <a:ea typeface="Open Sans"/>
                 <a:cs typeface="Open Sans"/>
                 <a:sym typeface="Open Sans"/>
               </a:rPr>
-              <a:t>APACHE SOFTWARE FOUNDATION. Apache ECharts Documentation – Getting Started. Disponível em: https://echarts.apache.org/handbook/en/get-started/</a:t>
+              <a:t>EFACT VISION AI. Soluções de visão computacional para indústria. 2025. Disponível em: https://visionai.efact.com.br. Acesso em: 11 maio 2026.</a:t>
             </a:r>
-            <a:endParaRPr sz="3430">
-              <a:latin typeface="Open Sans"/>
-              <a:ea typeface="Open Sans"/>
-              <a:cs typeface="Open Sans"/>
-              <a:sym typeface="Open Sans"/>
-            </a:endParaRPr>
-          </a:p>
-          <a:p>
-            <a:pPr marL="0" marR="0" lvl="0" indent="0" algn="just" rtl="0">
-              <a:lnSpc>
-                <a:spcPct val="140000"/>
-              </a:lnSpc>
-              <a:spcBef>
-                <a:spcPts val="0"/>
-              </a:spcBef>
-              <a:spcAft>
-                <a:spcPts val="0"/>
-              </a:spcAft>
-              <a:buClr>
-                <a:srgbClr val="000000"/>
-              </a:buClr>
-              <a:buSzPts val="3430"/>
-              <a:buFont typeface="Arial"/>
-              <a:buNone/>
-            </a:pPr>
-            <a:r>
-              <a:rPr lang="en-US" sz="3430">
-                <a:latin typeface="Open Sans"/>
-                <a:ea typeface="Open Sans"/>
-                <a:cs typeface="Open Sans"/>
-                <a:sym typeface="Open Sans"/>
-              </a:rPr>
-              <a:t>. Acesso em: 3 maio 2026.</a:t>
-            </a:r>
-            <a:endParaRPr sz="3430">
+            <a:endParaRPr sz="3430" dirty="0">
               <a:latin typeface="Open Sans"/>
               <a:ea typeface="Open Sans"/>
               <a:cs typeface="Open Sans"/>
@@ -17362,6 +17325,24 @@
                 <a:cs typeface="Open Sans"/>
                 <a:sym typeface="Open Sans"/>
               </a:rPr>
+              <a:t> de </a:t>
+            </a:r>
+            <a:r>
+              <a:rPr lang="en-US" sz="3430" dirty="0" err="1">
+                <a:latin typeface="Open Sans"/>
+                <a:ea typeface="Open Sans"/>
+                <a:cs typeface="Open Sans"/>
+                <a:sym typeface="Open Sans"/>
+              </a:rPr>
+              <a:t>visão</a:t>
+            </a:r>
+            <a:r>
+              <a:rPr lang="en-US" sz="3430" dirty="0">
+                <a:latin typeface="Open Sans"/>
+                <a:ea typeface="Open Sans"/>
+                <a:cs typeface="Open Sans"/>
+                <a:sym typeface="Open Sans"/>
+              </a:rPr>
               <a:t> </a:t>
             </a:r>
             <a:r>
@@ -17371,7 +17352,7 @@
                 <a:cs typeface="Open Sans"/>
                 <a:sym typeface="Open Sans"/>
               </a:rPr>
-              <a:t>em</a:t>
+              <a:t>computacional</a:t>
             </a:r>
             <a:r>
               <a:rPr lang="en-US" sz="3430" dirty="0">
@@ -17380,7 +17361,7 @@
                 <a:cs typeface="Open Sans"/>
                 <a:sym typeface="Open Sans"/>
               </a:rPr>
-              <a:t> Python para o </a:t>
+              <a:t>, com Python para o </a:t>
             </a:r>
             <a:r>
               <a:rPr lang="en-US" sz="3430" dirty="0" err="1">
@@ -17737,7 +17718,7 @@
         <p:spPr>
           <a:xfrm>
             <a:off x="1570045" y="10662612"/>
-            <a:ext cx="12562800" cy="8221200"/>
+            <a:ext cx="12562800" cy="7691465"/>
           </a:xfrm>
           <a:prstGeom prst="rect">
             <a:avLst/>
@@ -17770,7 +17751,7 @@
               <a:buFont typeface="Arial"/>
               <a:buNone/>
             </a:pPr>
-            <a:endParaRPr sz="1400" b="0" i="0" u="none" strike="noStrike" cap="none">
+            <a:endParaRPr sz="1400" b="0" i="0" u="none" strike="noStrike" cap="none" dirty="0">
               <a:solidFill>
                 <a:srgbClr val="000000"/>
               </a:solidFill>
@@ -17781,7 +17762,7 @@
             </a:endParaRPr>
           </a:p>
           <a:p>
-            <a:pPr marL="0" marR="0" lvl="0" indent="0" algn="just" rtl="0">
+            <a:pPr marL="457200" marR="0" lvl="0" indent="-457200" algn="just" rtl="0">
               <a:lnSpc>
                 <a:spcPct val="140000"/>
               </a:lnSpc>
@@ -17795,61 +17776,30 @@
                 <a:srgbClr val="000000"/>
               </a:buClr>
               <a:buSzPts val="3430"/>
-              <a:buFont typeface="Arial"/>
-              <a:buNone/>
+              <a:buFont typeface="Arial" panose="020B0604020202020204" pitchFamily="34" charset="0"/>
+              <a:buChar char="•"/>
             </a:pPr>
             <a:r>
-              <a:rPr lang="en-US" sz="3430">
+              <a:rPr lang="pt-BR" sz="3430" b="1" dirty="0">
                 <a:latin typeface="Open Sans"/>
                 <a:ea typeface="Open Sans"/>
                 <a:cs typeface="Open Sans"/>
                 <a:sym typeface="Open Sans"/>
               </a:rPr>
-              <a:t>A iniciativa de extensão Lideranças Empáticas atua em larga escala na arrecadação de alimentos, envolvendo diversos grupos e colaboradores.</a:t>
+              <a:t>Processo manual de contagem: </a:t>
             </a:r>
-            <a:endParaRPr sz="3430">
-              <a:latin typeface="Open Sans"/>
-              <a:ea typeface="Open Sans"/>
-              <a:cs typeface="Open Sans"/>
-              <a:sym typeface="Open Sans"/>
-            </a:endParaRPr>
-          </a:p>
-          <a:p>
-            <a:pPr marL="0" marR="0" lvl="0" indent="0" algn="just" rtl="0">
-              <a:lnSpc>
-                <a:spcPct val="140000"/>
-              </a:lnSpc>
-              <a:spcBef>
-                <a:spcPts val="0"/>
-              </a:spcBef>
-              <a:spcAft>
-                <a:spcPts val="0"/>
-              </a:spcAft>
-              <a:buClr>
-                <a:srgbClr val="000000"/>
-              </a:buClr>
-              <a:buSzPts val="3430"/>
-              <a:buFont typeface="Arial"/>
-              <a:buNone/>
-            </a:pPr>
             <a:r>
-              <a:rPr lang="en-US" sz="3430">
+              <a:rPr lang="pt-BR" sz="3430" dirty="0">
                 <a:latin typeface="Open Sans"/>
                 <a:ea typeface="Open Sans"/>
                 <a:cs typeface="Open Sans"/>
                 <a:sym typeface="Open Sans"/>
               </a:rPr>
-              <a:t>Atualmente, a contagem e o registro das doações são feitos manualmente, o que torna o processo lento e sujeito a erros. Em cenários com grande volume, isso pode gerar inconsistências nos dados e dificultar o controle e a análise das arrecadações.</a:t>
+              <a:t>atualmente, o registro das doações é realizado manualmente, tornando o processo mais lento e suscetível a falhas humanas.</a:t>
             </a:r>
-            <a:endParaRPr sz="3430">
-              <a:latin typeface="Open Sans"/>
-              <a:ea typeface="Open Sans"/>
-              <a:cs typeface="Open Sans"/>
-              <a:sym typeface="Open Sans"/>
-            </a:endParaRPr>
           </a:p>
           <a:p>
-            <a:pPr marL="0" marR="0" lvl="0" indent="0" algn="just" rtl="0">
+            <a:pPr marL="457200" marR="0" lvl="0" indent="-457200" algn="just" rtl="0">
               <a:lnSpc>
                 <a:spcPct val="140000"/>
               </a:lnSpc>
@@ -17863,19 +17813,65 @@
                 <a:srgbClr val="000000"/>
               </a:buClr>
               <a:buSzPts val="3430"/>
-              <a:buFont typeface="Arial"/>
-              <a:buNone/>
+              <a:buFont typeface="Arial" panose="020B0604020202020204" pitchFamily="34" charset="0"/>
+              <a:buChar char="•"/>
             </a:pPr>
             <a:r>
-              <a:rPr lang="en-US" sz="3430">
+              <a:rPr lang="pt-BR" sz="3430" b="1" dirty="0">
                 <a:latin typeface="Open Sans"/>
                 <a:ea typeface="Open Sans"/>
                 <a:cs typeface="Open Sans"/>
                 <a:sym typeface="Open Sans"/>
               </a:rPr>
-              <a:t>Estimativas indicam que processos manuais podem apresentar taxas de erro entre 5% e 15%, além de limitar a eficiência e a escalabilidade das operações.</a:t>
+              <a:t>Baixa precisão dos dados: </a:t>
             </a:r>
-            <a:endParaRPr sz="3430">
+            <a:r>
+              <a:rPr lang="pt-BR" sz="3430" dirty="0">
+                <a:latin typeface="Open Sans"/>
+                <a:ea typeface="Open Sans"/>
+                <a:cs typeface="Open Sans"/>
+                <a:sym typeface="Open Sans"/>
+              </a:rPr>
+              <a:t>métodos tradicionais de contagem alcançam cerca de 82,5% de precisão, enquanto sistemas com visão computacional podem atingir aproximadamente 91%.</a:t>
+            </a:r>
+          </a:p>
+          <a:p>
+            <a:pPr marL="457200" marR="0" lvl="0" indent="-457200" algn="just" rtl="0">
+              <a:lnSpc>
+                <a:spcPct val="140000"/>
+              </a:lnSpc>
+              <a:spcBef>
+                <a:spcPts val="0"/>
+              </a:spcBef>
+              <a:spcAft>
+                <a:spcPts val="0"/>
+              </a:spcAft>
+              <a:buClr>
+                <a:srgbClr val="000000"/>
+              </a:buClr>
+              <a:buSzPts val="3430"/>
+              <a:buFont typeface="Arial" panose="020B0604020202020204" pitchFamily="34" charset="0"/>
+              <a:buChar char="•"/>
+            </a:pPr>
+            <a:r>
+              <a:rPr lang="pt-BR" sz="3430" b="1" dirty="0">
+                <a:latin typeface="Open Sans"/>
+                <a:ea typeface="Open Sans"/>
+                <a:cs typeface="Open Sans"/>
+                <a:sym typeface="Open Sans"/>
+              </a:rPr>
+              <a:t>Necessidade de modernização</a:t>
+            </a:r>
+            <a:r>
+              <a:rPr lang="pt-BR" sz="3430" dirty="0">
+                <a:latin typeface="Open Sans"/>
+                <a:ea typeface="Open Sans"/>
+                <a:cs typeface="Open Sans"/>
+                <a:sym typeface="Open Sans"/>
+              </a:rPr>
+              <a:t>: a automação com visão computacional permite processos mais rápidos, precisos e confiáveis no controle das arrecadações.</a:t>
+            </a:r>
+            <a:endParaRPr sz="3430" dirty="0">
               <a:latin typeface="Open Sans"/>
               <a:ea typeface="Open Sans"/>
               <a:cs typeface="Open Sans"/>
@@ -17892,8 +17888,8 @@
         </p:nvSpPr>
         <p:spPr>
           <a:xfrm>
-            <a:off x="1570066" y="21125709"/>
-            <a:ext cx="12562800" cy="7919400"/>
+            <a:off x="1570066" y="20897109"/>
+            <a:ext cx="12562800" cy="9606797"/>
           </a:xfrm>
           <a:prstGeom prst="rect">
             <a:avLst/>
@@ -17909,7 +17905,7 @@
           </a:bodyPr>
           <a:lstStyle/>
           <a:p>
-            <a:pPr marL="0" marR="0" lvl="0" indent="0" algn="just" rtl="0">
+            <a:pPr marL="457200" marR="0" lvl="0" indent="-457200" algn="just" rtl="0">
               <a:lnSpc>
                 <a:spcPct val="140000"/>
               </a:lnSpc>
@@ -17923,19 +17919,132 @@
                 <a:srgbClr val="000000"/>
               </a:buClr>
               <a:buSzPts val="3430"/>
-              <a:buFont typeface="Arial"/>
-              <a:buNone/>
+              <a:buFont typeface="Arial" panose="020B0604020202020204" pitchFamily="34" charset="0"/>
+              <a:buChar char="•"/>
             </a:pPr>
             <a:r>
-              <a:rPr lang="en-US" sz="3430">
+              <a:rPr lang="pt-BR" sz="3430" b="1" i="0" u="none" strike="noStrike" cap="none" dirty="0">
+                <a:solidFill>
+                  <a:srgbClr val="000000"/>
+                </a:solidFill>
                 <a:latin typeface="Open Sans"/>
                 <a:ea typeface="Open Sans"/>
                 <a:cs typeface="Open Sans"/>
                 <a:sym typeface="Open Sans"/>
               </a:rPr>
-              <a:t>A proposta desta iniciativa é implementar um sistema de visão computacional capaz de automatizar o reconhecimento e a contagem de alimentos não perecíveis em tempo real.</a:t>
+              <a:t>Implementação de visão computacional</a:t>
             </a:r>
-            <a:endParaRPr sz="3430">
+            <a:r>
+              <a:rPr lang="pt-BR" sz="3430" b="1" dirty="0">
+                <a:latin typeface="Open Sans"/>
+                <a:ea typeface="Open Sans"/>
+                <a:cs typeface="Open Sans"/>
+                <a:sym typeface="Open Sans"/>
+              </a:rPr>
+              <a:t>: </a:t>
+            </a:r>
+            <a:r>
+              <a:rPr lang="pt-BR" sz="3430" dirty="0">
+                <a:latin typeface="Open Sans"/>
+                <a:ea typeface="Open Sans"/>
+                <a:cs typeface="Open Sans"/>
+                <a:sym typeface="Open Sans"/>
+              </a:rPr>
+              <a:t>sistema capaz de reconhecer e contar alimentos não perecíveis em tempo real, com integração com plataforma digital para acompanhamento de doações.</a:t>
+            </a:r>
+          </a:p>
+          <a:p>
+            <a:pPr marL="457200" marR="0" lvl="0" indent="-457200" algn="just" rtl="0">
+              <a:lnSpc>
+                <a:spcPct val="140000"/>
+              </a:lnSpc>
+              <a:spcBef>
+                <a:spcPts val="0"/>
+              </a:spcBef>
+              <a:spcAft>
+                <a:spcPts val="0"/>
+              </a:spcAft>
+              <a:buClr>
+                <a:srgbClr val="000000"/>
+              </a:buClr>
+              <a:buSzPts val="3430"/>
+              <a:buFont typeface="Arial" panose="020B0604020202020204" pitchFamily="34" charset="0"/>
+              <a:buChar char="•"/>
+            </a:pPr>
+            <a:r>
+              <a:rPr lang="pt-BR" sz="3430" b="1" dirty="0">
+                <a:latin typeface="Open Sans"/>
+                <a:ea typeface="Open Sans"/>
+                <a:cs typeface="Open Sans"/>
+                <a:sym typeface="Open Sans"/>
+              </a:rPr>
+              <a:t>Automatização: </a:t>
+            </a:r>
+            <a:r>
+              <a:rPr lang="pt-BR" sz="3430" dirty="0">
+                <a:latin typeface="Open Sans"/>
+                <a:ea typeface="Open Sans"/>
+                <a:cs typeface="Open Sans"/>
+                <a:sym typeface="Open Sans"/>
+              </a:rPr>
+              <a:t>a contagem, antes manual, demorada e sujeita a erros, passa a ser mais prática, rápida e confiável.</a:t>
+            </a:r>
+          </a:p>
+          <a:p>
+            <a:pPr marL="457200" marR="0" lvl="0" indent="-457200" algn="just" rtl="0">
+              <a:lnSpc>
+                <a:spcPct val="140000"/>
+              </a:lnSpc>
+              <a:spcBef>
+                <a:spcPts val="0"/>
+              </a:spcBef>
+              <a:spcAft>
+                <a:spcPts val="0"/>
+              </a:spcAft>
+              <a:buClr>
+                <a:srgbClr val="000000"/>
+              </a:buClr>
+              <a:buSzPts val="3430"/>
+              <a:buFont typeface="Arial" panose="020B0604020202020204" pitchFamily="34" charset="0"/>
+              <a:buChar char="•"/>
+            </a:pPr>
+            <a:r>
+              <a:rPr lang="pt-BR" sz="3430" b="1" dirty="0">
+                <a:latin typeface="Open Sans"/>
+                <a:ea typeface="Open Sans"/>
+                <a:cs typeface="Open Sans"/>
+                <a:sym typeface="Open Sans"/>
+              </a:rPr>
+              <a:t>Dados: e</a:t>
+            </a:r>
+            <a:r>
+              <a:rPr lang="pt-BR" sz="3430" dirty="0">
+                <a:latin typeface="Open Sans"/>
+                <a:ea typeface="Open Sans"/>
+                <a:cs typeface="Open Sans"/>
+                <a:sym typeface="Open Sans"/>
+              </a:rPr>
+              <a:t>studos recentes mostram que sistemas de visão computacional, podem diminuir em até 85% os erros e </a:t>
+            </a:r>
+            <a:r>
+              <a:rPr lang="pt-BR" sz="3430" dirty="0" err="1">
+                <a:latin typeface="Open Sans"/>
+                <a:ea typeface="Open Sans"/>
+                <a:cs typeface="Open Sans"/>
+                <a:sym typeface="Open Sans"/>
+              </a:rPr>
+              <a:t>subcontagem</a:t>
+            </a:r>
+            <a:r>
+              <a:rPr lang="pt-BR" sz="3430" dirty="0">
+                <a:latin typeface="Open Sans"/>
+                <a:ea typeface="Open Sans"/>
+                <a:cs typeface="Open Sans"/>
+                <a:sym typeface="Open Sans"/>
+              </a:rPr>
+              <a:t> e reduzir o tempo de atualização de registro dentre 30-35 minutos, para cerca de 10-12 minutos. Além disso, soluções industriais alcançam precisão de contagem superior a 99%.</a:t>
+            </a:r>
+            <a:endParaRPr lang="pt-BR" sz="3430" b="1" dirty="0">
               <a:latin typeface="Open Sans"/>
               <a:ea typeface="Open Sans"/>
               <a:cs typeface="Open Sans"/>
@@ -17943,7 +18052,7 @@
             </a:endParaRPr>
           </a:p>
           <a:p>
-            <a:pPr marL="0" marR="0" lvl="0" indent="0" algn="just" rtl="0">
+            <a:pPr marL="457200" marR="0" lvl="0" indent="-457200" algn="just" rtl="0">
               <a:lnSpc>
                 <a:spcPct val="140000"/>
               </a:lnSpc>
@@ -17957,155 +18066,10 @@
                 <a:srgbClr val="000000"/>
               </a:buClr>
               <a:buSzPts val="3430"/>
-              <a:buFont typeface="Arial"/>
-              <a:buNone/>
+              <a:buFont typeface="Arial" panose="020B0604020202020204" pitchFamily="34" charset="0"/>
+              <a:buChar char="•"/>
             </a:pPr>
-            <a:r>
-              <a:rPr lang="en-US" sz="3430">
-                <a:latin typeface="Open Sans"/>
-                <a:ea typeface="Open Sans"/>
-                <a:cs typeface="Open Sans"/>
-                <a:sym typeface="Open Sans"/>
-              </a:rPr>
-              <a:t>O sistema será integrado a uma plataforma digital que permitirá:</a:t>
-            </a:r>
-            <a:endParaRPr sz="3430">
-              <a:latin typeface="Open Sans"/>
-              <a:ea typeface="Open Sans"/>
-              <a:cs typeface="Open Sans"/>
-              <a:sym typeface="Open Sans"/>
-            </a:endParaRPr>
-          </a:p>
-          <a:p>
-            <a:pPr marL="914400" marR="0" lvl="0" indent="-446405" algn="just" rtl="0">
-              <a:lnSpc>
-                <a:spcPct val="140000"/>
-              </a:lnSpc>
-              <a:spcBef>
-                <a:spcPts val="0"/>
-              </a:spcBef>
-              <a:spcAft>
-                <a:spcPts val="0"/>
-              </a:spcAft>
-              <a:buSzPts val="3430"/>
-              <a:buFont typeface="Open Sans"/>
-              <a:buChar char="●"/>
-            </a:pPr>
-            <a:r>
-              <a:rPr lang="en-US" sz="3430">
-                <a:latin typeface="Open Sans"/>
-                <a:ea typeface="Open Sans"/>
-                <a:cs typeface="Open Sans"/>
-                <a:sym typeface="Open Sans"/>
-              </a:rPr>
-              <a:t>registro automatizado das doações</a:t>
-            </a:r>
-            <a:endParaRPr sz="3430">
-              <a:latin typeface="Open Sans"/>
-              <a:ea typeface="Open Sans"/>
-              <a:cs typeface="Open Sans"/>
-              <a:sym typeface="Open Sans"/>
-            </a:endParaRPr>
-          </a:p>
-          <a:p>
-            <a:pPr marL="914400" marR="0" lvl="0" indent="-446405" algn="just" rtl="0">
-              <a:lnSpc>
-                <a:spcPct val="140000"/>
-              </a:lnSpc>
-              <a:spcBef>
-                <a:spcPts val="0"/>
-              </a:spcBef>
-              <a:spcAft>
-                <a:spcPts val="0"/>
-              </a:spcAft>
-              <a:buSzPts val="3430"/>
-              <a:buFont typeface="Open Sans"/>
-              <a:buChar char="●"/>
-            </a:pPr>
-            <a:r>
-              <a:rPr lang="en-US" sz="3430">
-                <a:latin typeface="Open Sans"/>
-                <a:ea typeface="Open Sans"/>
-                <a:cs typeface="Open Sans"/>
-                <a:sym typeface="Open Sans"/>
-              </a:rPr>
-              <a:t>organização de grupos de alunos</a:t>
-            </a:r>
-            <a:endParaRPr sz="3430">
-              <a:latin typeface="Open Sans"/>
-              <a:ea typeface="Open Sans"/>
-              <a:cs typeface="Open Sans"/>
-              <a:sym typeface="Open Sans"/>
-            </a:endParaRPr>
-          </a:p>
-          <a:p>
-            <a:pPr marL="0" marR="0" lvl="0" indent="0" algn="just" rtl="0">
-              <a:lnSpc>
-                <a:spcPct val="140000"/>
-              </a:lnSpc>
-              <a:spcBef>
-                <a:spcPts val="0"/>
-              </a:spcBef>
-              <a:spcAft>
-                <a:spcPts val="0"/>
-              </a:spcAft>
-              <a:buClr>
-                <a:srgbClr val="000000"/>
-              </a:buClr>
-              <a:buSzPts val="3430"/>
-              <a:buFont typeface="Arial"/>
-              <a:buNone/>
-            </a:pPr>
-            <a:r>
-              <a:rPr lang="en-US" sz="3430">
-                <a:latin typeface="Open Sans"/>
-                <a:ea typeface="Open Sans"/>
-                <a:cs typeface="Open Sans"/>
-                <a:sym typeface="Open Sans"/>
-              </a:rPr>
-              <a:t>O foco é transformar um processo manual e demorado em um fluxo automatizado, rápido e confiável, permitindo que a equipe foque mais na ação social do que na operação</a:t>
-            </a:r>
-            <a:r>
-              <a:rPr lang="en-US" sz="3430" b="0" i="0" u="none" strike="noStrike" cap="none">
-                <a:solidFill>
-                  <a:srgbClr val="000000"/>
-                </a:solidFill>
-                <a:latin typeface="Open Sans"/>
-                <a:ea typeface="Open Sans"/>
-                <a:cs typeface="Open Sans"/>
-                <a:sym typeface="Open Sans"/>
-              </a:rPr>
-              <a:t> </a:t>
-            </a:r>
-            <a:endParaRPr sz="1400" b="0" i="0" u="none" strike="noStrike" cap="none">
-              <a:solidFill>
-                <a:srgbClr val="000000"/>
-              </a:solidFill>
-              <a:latin typeface="Arial"/>
-              <a:ea typeface="Arial"/>
-              <a:cs typeface="Arial"/>
-              <a:sym typeface="Arial"/>
-            </a:endParaRPr>
-          </a:p>
-          <a:p>
-            <a:pPr marL="0" marR="0" lvl="0" indent="0" algn="just" rtl="0">
-              <a:lnSpc>
-                <a:spcPct val="140000"/>
-              </a:lnSpc>
-              <a:spcBef>
-                <a:spcPts val="0"/>
-              </a:spcBef>
-              <a:spcAft>
-                <a:spcPts val="0"/>
-              </a:spcAft>
-              <a:buClr>
-                <a:srgbClr val="000000"/>
-              </a:buClr>
-              <a:buSzPts val="3430"/>
-              <a:buFont typeface="Arial"/>
-              <a:buNone/>
-            </a:pPr>
-            <a:endParaRPr sz="3430" b="0" i="0" u="none" strike="noStrike" cap="none">
+            <a:endParaRPr sz="3430" i="0" u="none" strike="noStrike" cap="none" dirty="0">
               <a:solidFill>
                 <a:srgbClr val="000000"/>
               </a:solidFill>
@@ -18232,7 +18196,7 @@
         <p:spPr>
           <a:xfrm>
             <a:off x="15588691" y="11277767"/>
-            <a:ext cx="11904300" cy="5702100"/>
+            <a:ext cx="11904300" cy="3694922"/>
           </a:xfrm>
           <a:prstGeom prst="rect">
             <a:avLst/>
@@ -18266,15 +18230,69 @@
               <a:buNone/>
             </a:pPr>
             <a:r>
-              <a:rPr lang="en-US" sz="3430">
+              <a:rPr lang="en-US" sz="3430" dirty="0">
                 <a:latin typeface="Open Sans"/>
                 <a:ea typeface="Open Sans"/>
                 <a:cs typeface="Open Sans"/>
                 <a:sym typeface="Open Sans"/>
               </a:rPr>
-              <a:t>Com a adoção da solução, espera-se:</a:t>
+              <a:t>Com a </a:t>
             </a:r>
-            <a:endParaRPr sz="3430">
+            <a:r>
+              <a:rPr lang="en-US" sz="3430" dirty="0" err="1">
+                <a:latin typeface="Open Sans"/>
+                <a:ea typeface="Open Sans"/>
+                <a:cs typeface="Open Sans"/>
+                <a:sym typeface="Open Sans"/>
+              </a:rPr>
+              <a:t>adoção</a:t>
+            </a:r>
+            <a:r>
+              <a:rPr lang="en-US" sz="3430" dirty="0">
+                <a:latin typeface="Open Sans"/>
+                <a:ea typeface="Open Sans"/>
+                <a:cs typeface="Open Sans"/>
+                <a:sym typeface="Open Sans"/>
+              </a:rPr>
+              <a:t> da </a:t>
+            </a:r>
+            <a:r>
+              <a:rPr lang="en-US" sz="3430" dirty="0" err="1">
+                <a:latin typeface="Open Sans"/>
+                <a:ea typeface="Open Sans"/>
+                <a:cs typeface="Open Sans"/>
+                <a:sym typeface="Open Sans"/>
+              </a:rPr>
+              <a:t>solução</a:t>
+            </a:r>
+            <a:r>
+              <a:rPr lang="en-US" sz="3430" dirty="0">
+                <a:latin typeface="Open Sans"/>
+                <a:ea typeface="Open Sans"/>
+                <a:cs typeface="Open Sans"/>
+                <a:sym typeface="Open Sans"/>
+              </a:rPr>
+              <a:t>, </a:t>
+            </a:r>
+            <a:r>
+              <a:rPr lang="en-US" sz="3430" dirty="0" err="1">
+                <a:latin typeface="Open Sans"/>
+                <a:ea typeface="Open Sans"/>
+                <a:cs typeface="Open Sans"/>
+                <a:sym typeface="Open Sans"/>
+              </a:rPr>
+              <a:t>espera</a:t>
+            </a:r>
+            <a:r>
+              <a:rPr lang="en-US" sz="3430" dirty="0">
+                <a:latin typeface="Open Sans"/>
+                <a:ea typeface="Open Sans"/>
+                <a:cs typeface="Open Sans"/>
+                <a:sym typeface="Open Sans"/>
+              </a:rPr>
+              <a:t>-se:</a:t>
+            </a:r>
+            <a:endParaRPr sz="3430" dirty="0">
               <a:latin typeface="Open Sans"/>
               <a:ea typeface="Open Sans"/>
               <a:cs typeface="Open Sans"/>
@@ -18297,15 +18315,15 @@
               <a:buChar char="●"/>
             </a:pPr>
             <a:r>
-              <a:rPr lang="en-US" sz="3430">
+              <a:rPr lang="pt-BR" sz="3430" dirty="0">
                 <a:latin typeface="Open Sans"/>
                 <a:ea typeface="Open Sans"/>
                 <a:cs typeface="Open Sans"/>
                 <a:sym typeface="Open Sans"/>
               </a:rPr>
-              <a:t>redução de até 70% no tempo de contagem dos alimentos</a:t>
+              <a:t>Redução do tempo de contagem</a:t>
             </a:r>
-            <a:endParaRPr sz="3430">
+            <a:endParaRPr sz="3430" dirty="0">
               <a:latin typeface="Open Sans"/>
               <a:ea typeface="Open Sans"/>
               <a:cs typeface="Open Sans"/>
@@ -18328,15 +18346,51 @@
               <a:buChar char="●"/>
             </a:pPr>
             <a:r>
-              <a:rPr lang="en-US" sz="3430">
+              <a:rPr lang="en-US" sz="3430" dirty="0" err="1">
                 <a:latin typeface="Open Sans"/>
                 <a:ea typeface="Open Sans"/>
                 <a:cs typeface="Open Sans"/>
                 <a:sym typeface="Open Sans"/>
               </a:rPr>
-              <a:t>diminuição significativa de erros humanos (podendo cair para menos de 2%)</a:t>
+              <a:t>Diminuição</a:t>
             </a:r>
-            <a:endParaRPr sz="3430">
+            <a:r>
+              <a:rPr lang="en-US" sz="3430" dirty="0">
+                <a:latin typeface="Open Sans"/>
+                <a:ea typeface="Open Sans"/>
+                <a:cs typeface="Open Sans"/>
+                <a:sym typeface="Open Sans"/>
+              </a:rPr>
+              <a:t> significative de </a:t>
+            </a:r>
+            <a:r>
+              <a:rPr lang="en-US" sz="3430" dirty="0" err="1">
+                <a:latin typeface="Open Sans"/>
+                <a:ea typeface="Open Sans"/>
+                <a:cs typeface="Open Sans"/>
+                <a:sym typeface="Open Sans"/>
+              </a:rPr>
+              <a:t>erros</a:t>
+            </a:r>
+            <a:r>
+              <a:rPr lang="en-US" sz="3430" dirty="0">
+                <a:latin typeface="Open Sans"/>
+                <a:ea typeface="Open Sans"/>
+                <a:cs typeface="Open Sans"/>
+                <a:sym typeface="Open Sans"/>
+              </a:rPr>
+              <a:t> </a:t>
+            </a:r>
+            <a:r>
+              <a:rPr lang="en-US" sz="3430" dirty="0" err="1">
+                <a:latin typeface="Open Sans"/>
+                <a:ea typeface="Open Sans"/>
+                <a:cs typeface="Open Sans"/>
+                <a:sym typeface="Open Sans"/>
+              </a:rPr>
+              <a:t>humanos</a:t>
+            </a:r>
+            <a:endParaRPr sz="3430" dirty="0">
               <a:latin typeface="Open Sans"/>
               <a:ea typeface="Open Sans"/>
               <a:cs typeface="Open Sans"/>
@@ -18359,15 +18413,15 @@
               <a:buChar char="●"/>
             </a:pPr>
             <a:r>
-              <a:rPr lang="en-US" sz="3430">
+              <a:rPr lang="pt-BR" sz="3430" dirty="0">
                 <a:latin typeface="Open Sans"/>
                 <a:ea typeface="Open Sans"/>
                 <a:cs typeface="Open Sans"/>
                 <a:sym typeface="Open Sans"/>
               </a:rPr>
-              <a:t>maior controle e rastreabilidade das doações</a:t>
+              <a:t>Maior controle e rastreabilidade de doações</a:t>
             </a:r>
-            <a:endParaRPr sz="3430">
+            <a:endParaRPr sz="3430" dirty="0">
               <a:latin typeface="Open Sans"/>
               <a:ea typeface="Open Sans"/>
               <a:cs typeface="Open Sans"/>
@@ -18390,15 +18444,42 @@
               <a:buChar char="●"/>
             </a:pPr>
             <a:r>
-              <a:rPr lang="en-US" sz="3430">
+              <a:rPr lang="en-US" sz="3430" dirty="0" err="1">
                 <a:latin typeface="Open Sans"/>
                 <a:ea typeface="Open Sans"/>
                 <a:cs typeface="Open Sans"/>
                 <a:sym typeface="Open Sans"/>
               </a:rPr>
-              <a:t>acesso a dashboards em tempo real para melhor visualização de dados</a:t>
+              <a:t>Acesso</a:t>
             </a:r>
-            <a:endParaRPr sz="1400" b="0" i="0" u="none" strike="noStrike" cap="none">
+            <a:r>
+              <a:rPr lang="en-US" sz="3430" dirty="0">
+                <a:latin typeface="Open Sans"/>
+                <a:ea typeface="Open Sans"/>
+                <a:cs typeface="Open Sans"/>
+                <a:sym typeface="Open Sans"/>
+              </a:rPr>
+              <a:t> a dashboards, para </a:t>
+            </a:r>
+            <a:r>
+              <a:rPr lang="en-US" sz="3430" dirty="0" err="1">
+                <a:latin typeface="Open Sans"/>
+                <a:ea typeface="Open Sans"/>
+                <a:cs typeface="Open Sans"/>
+                <a:sym typeface="Open Sans"/>
+              </a:rPr>
+              <a:t>visualização</a:t>
+            </a:r>
+            <a:r>
+              <a:rPr lang="en-US" sz="3430" dirty="0">
+                <a:latin typeface="Open Sans"/>
+                <a:ea typeface="Open Sans"/>
+                <a:cs typeface="Open Sans"/>
+                <a:sym typeface="Open Sans"/>
+              </a:rPr>
+              <a:t> de dados</a:t>
+            </a:r>
+            <a:endParaRPr sz="1400" b="0" i="0" u="none" strike="noStrike" cap="none" dirty="0">
               <a:solidFill>
                 <a:srgbClr val="000000"/>
               </a:solidFill>
@@ -18419,7 +18500,7 @@
         <p:spPr>
           <a:xfrm>
             <a:off x="15714839" y="23464385"/>
-            <a:ext cx="11652000" cy="2745300"/>
+            <a:ext cx="11652000" cy="2955937"/>
           </a:xfrm>
           <a:prstGeom prst="rect">
             <a:avLst/>
@@ -18453,78 +18534,24 @@
               <a:buNone/>
             </a:pPr>
             <a:r>
-              <a:rPr lang="en-US" sz="3430">
+              <a:rPr lang="pt-BR" sz="3430" dirty="0">
                 <a:latin typeface="Open Sans"/>
                 <a:ea typeface="Open Sans"/>
                 <a:cs typeface="Open Sans"/>
                 <a:sym typeface="Open Sans"/>
               </a:rPr>
-              <a:t>Além disso, a digitalização do processo permite maior transparência e engajamento, especialmente entre os grupos de alunos, que passam a acompanhar seu desempenho de forma clara e imediata.</a:t>
+              <a:t>Embora o projeto ainda esteja em fase de desenvolvimento e validação, espera-se que a aplicação da visão computacional contribua para tornar o processo mais eficiente, organizado e confiável.</a:t>
             </a:r>
-            <a:endParaRPr sz="1400" b="0" i="0" u="none" strike="noStrike" cap="none">
-              <a:solidFill>
-                <a:srgbClr val="000000"/>
-              </a:solidFill>
-              <a:latin typeface="Arial"/>
-              <a:ea typeface="Arial"/>
-              <a:cs typeface="Arial"/>
-              <a:sym typeface="Arial"/>
-            </a:endParaRPr>
-          </a:p>
-        </p:txBody>
-      </p:sp>
-      <p:sp>
-        <p:nvSpPr>
-          <p:cNvPr id="138" name="Google Shape;138;p1"/>
-          <p:cNvSpPr txBox="1"/>
-          <p:nvPr/>
-        </p:nvSpPr>
-        <p:spPr>
-          <a:xfrm>
-            <a:off x="15714839" y="18849485"/>
-            <a:ext cx="11652000" cy="528000"/>
-          </a:xfrm>
-          <a:prstGeom prst="rect">
-            <a:avLst/>
-          </a:prstGeom>
-          <a:noFill/>
-          <a:ln>
-            <a:noFill/>
-          </a:ln>
-        </p:spPr>
-        <p:txBody>
-          <a:bodyPr spcFirstLastPara="1" wrap="square" lIns="0" tIns="0" rIns="0" bIns="0" anchor="t" anchorCtr="0">
-            <a:spAutoFit/>
-          </a:bodyPr>
-          <a:lstStyle/>
-          <a:p>
-            <a:pPr marL="0" marR="0" lvl="0" indent="0" algn="just" rtl="0">
-              <a:lnSpc>
-                <a:spcPct val="140000"/>
-              </a:lnSpc>
-              <a:spcBef>
-                <a:spcPts val="0"/>
-              </a:spcBef>
-              <a:spcAft>
-                <a:spcPts val="0"/>
-              </a:spcAft>
-              <a:buClr>
-                <a:srgbClr val="000000"/>
-              </a:buClr>
-              <a:buSzPts val="3430"/>
-              <a:buFont typeface="Arial"/>
-              <a:buNone/>
-            </a:pPr>
             <a:r>
-              <a:rPr lang="en-US" sz="3430">
+              <a:rPr lang="en-US" sz="3430" dirty="0">
                 <a:latin typeface="Open Sans"/>
                 <a:ea typeface="Open Sans"/>
                 <a:cs typeface="Open Sans"/>
                 <a:sym typeface="Open Sans"/>
               </a:rPr>
-              <a:t>IMAGEM DO DASHBOARD</a:t>
+              <a:t>.</a:t>
             </a:r>
-            <a:endParaRPr sz="1400" b="0" i="0" u="none" strike="noStrike" cap="none">
+            <a:endParaRPr sz="1400" b="0" i="0" u="none" strike="noStrike" cap="none" dirty="0">
               <a:solidFill>
                 <a:srgbClr val="000000"/>
               </a:solidFill>
@@ -18567,6 +18594,106 @@
           </a:bodyPr>
           <a:lstStyle/>
           <a:p>
+            <a:pPr marR="0" lvl="0" algn="just" rtl="0">
+              <a:lnSpc>
+                <a:spcPct val="140000"/>
+              </a:lnSpc>
+              <a:spcBef>
+                <a:spcPts val="0"/>
+              </a:spcBef>
+              <a:spcAft>
+                <a:spcPts val="0"/>
+              </a:spcAft>
+              <a:buClr>
+                <a:srgbClr val="000000"/>
+              </a:buClr>
+              <a:buSzPts val="3430"/>
+            </a:pPr>
+            <a:r>
+              <a:rPr lang="pt-BR" sz="3430" b="0" i="0" u="none" strike="noStrike" cap="none" dirty="0">
+                <a:solidFill>
+                  <a:srgbClr val="000000"/>
+                </a:solidFill>
+                <a:latin typeface="Open Sans" panose="020B0606030504020204" pitchFamily="34" charset="0"/>
+                <a:ea typeface="Open Sans" panose="020B0606030504020204" pitchFamily="34" charset="0"/>
+                <a:cs typeface="Open Sans" panose="020B0606030504020204" pitchFamily="34" charset="0"/>
+                <a:sym typeface="Arial"/>
+              </a:rPr>
+              <a:t>    </a:t>
+            </a:r>
+            <a:r>
+              <a:rPr lang="pt-BR" sz="3430" b="0" i="0" u="none" strike="noStrike" cap="none" dirty="0" err="1">
+                <a:solidFill>
+                  <a:srgbClr val="000000"/>
+                </a:solidFill>
+                <a:latin typeface="Open Sans" panose="020B0606030504020204" pitchFamily="34" charset="0"/>
+                <a:ea typeface="Open Sans" panose="020B0606030504020204" pitchFamily="34" charset="0"/>
+                <a:cs typeface="Open Sans" panose="020B0606030504020204" pitchFamily="34" charset="0"/>
+                <a:sym typeface="Arial"/>
+              </a:rPr>
+              <a:t>FastApi</a:t>
+            </a:r>
+            <a:endParaRPr lang="pt-BR" sz="3430" b="0" i="0" u="none" strike="noStrike" cap="none" dirty="0">
+              <a:solidFill>
+                <a:srgbClr val="000000"/>
+              </a:solidFill>
+              <a:latin typeface="Open Sans" panose="020B0606030504020204" pitchFamily="34" charset="0"/>
+              <a:ea typeface="Open Sans" panose="020B0606030504020204" pitchFamily="34" charset="0"/>
+              <a:cs typeface="Open Sans" panose="020B0606030504020204" pitchFamily="34" charset="0"/>
+              <a:sym typeface="Arial"/>
+            </a:endParaRPr>
+          </a:p>
+          <a:p>
+            <a:pPr marR="0" lvl="0" algn="just" rtl="0">
+              <a:lnSpc>
+                <a:spcPct val="140000"/>
+              </a:lnSpc>
+              <a:spcBef>
+                <a:spcPts val="0"/>
+              </a:spcBef>
+              <a:spcAft>
+                <a:spcPts val="0"/>
+              </a:spcAft>
+              <a:buClr>
+                <a:srgbClr val="000000"/>
+              </a:buClr>
+              <a:buSzPts val="3430"/>
+            </a:pPr>
+            <a:r>
+              <a:rPr lang="pt-BR" sz="3430" b="0" i="0" u="none" strike="noStrike" cap="none" dirty="0">
+                <a:solidFill>
+                  <a:srgbClr val="000000"/>
+                </a:solidFill>
+                <a:latin typeface="Open Sans" panose="020B0606030504020204" pitchFamily="34" charset="0"/>
+                <a:ea typeface="Open Sans" panose="020B0606030504020204" pitchFamily="34" charset="0"/>
+                <a:cs typeface="Open Sans" panose="020B0606030504020204" pitchFamily="34" charset="0"/>
+                <a:sym typeface="Arial"/>
+              </a:rPr>
+              <a:t>    </a:t>
+            </a:r>
+            <a:r>
+              <a:rPr lang="pt-BR" sz="3430" b="0" i="0" u="none" strike="noStrike" cap="none" dirty="0" err="1">
+                <a:solidFill>
+                  <a:srgbClr val="000000"/>
+                </a:solidFill>
+                <a:latin typeface="Open Sans" panose="020B0606030504020204" pitchFamily="34" charset="0"/>
+                <a:ea typeface="Open Sans" panose="020B0606030504020204" pitchFamily="34" charset="0"/>
+                <a:cs typeface="Open Sans" panose="020B0606030504020204" pitchFamily="34" charset="0"/>
+                <a:sym typeface="Arial"/>
+              </a:rPr>
+              <a:t>SQLAlchemy</a:t>
+            </a:r>
+            <a:endParaRPr lang="pt-BR" sz="3430" b="0" i="0" u="none" strike="noStrike" cap="none" dirty="0">
+              <a:solidFill>
+                <a:srgbClr val="000000"/>
+              </a:solidFill>
+              <a:latin typeface="Open Sans" panose="020B0606030504020204" pitchFamily="34" charset="0"/>
+              <a:ea typeface="Open Sans" panose="020B0606030504020204" pitchFamily="34" charset="0"/>
+              <a:cs typeface="Open Sans" panose="020B0606030504020204" pitchFamily="34" charset="0"/>
+              <a:sym typeface="Arial"/>
+            </a:endParaRPr>
+          </a:p>
+          <a:p>
             <a:pPr marL="457200" marR="0" lvl="0" indent="-457200" algn="just" rtl="0">
               <a:lnSpc>
                 <a:spcPct val="140000"/>
@@ -18585,101 +18712,459 @@
               <a:buChar char="•"/>
             </a:pPr>
             <a:r>
-              <a:rPr lang="pt-BR" sz="3400" b="0" i="0" u="none" strike="noStrike" cap="none" dirty="0" err="1">
-                <a:solidFill>
-                  <a:srgbClr val="000000"/>
-                </a:solidFill>
-                <a:latin typeface="Arial"/>
-                <a:ea typeface="Arial"/>
-                <a:cs typeface="Arial"/>
-                <a:sym typeface="Arial"/>
+              <a:rPr lang="pt-BR" sz="3430" dirty="0">
+                <a:latin typeface="Open Sans" panose="020B0606030504020204" pitchFamily="34" charset="0"/>
+                <a:ea typeface="Open Sans" panose="020B0606030504020204" pitchFamily="34" charset="0"/>
+                <a:cs typeface="Open Sans" panose="020B0606030504020204" pitchFamily="34" charset="0"/>
               </a:rPr>
-              <a:t>FastApi</a:t>
-            </a:r>
-            <a:endParaRPr lang="pt-BR" sz="3400" b="0" i="0" u="none" strike="noStrike" cap="none" dirty="0">
-              <a:solidFill>
-                <a:srgbClr val="000000"/>
-              </a:solidFill>
-              <a:latin typeface="Arial"/>
-              <a:ea typeface="Arial"/>
-              <a:cs typeface="Arial"/>
-              <a:sym typeface="Arial"/>
-            </a:endParaRPr>
-          </a:p>
-          <a:p>
-            <a:pPr marL="457200" marR="0" lvl="0" indent="-457200" algn="just" rtl="0">
-              <a:lnSpc>
-                <a:spcPct val="140000"/>
-              </a:lnSpc>
-              <a:spcBef>
-                <a:spcPts val="0"/>
-              </a:spcBef>
-              <a:spcAft>
-                <a:spcPts val="0"/>
-              </a:spcAft>
-              <a:buClr>
-                <a:srgbClr val="000000"/>
-              </a:buClr>
-              <a:buSzPts val="3430"/>
-              <a:buFont typeface="Arial" panose="020B0604020202020204" pitchFamily="34" charset="0"/>
-              <a:buChar char="•"/>
-            </a:pPr>
-            <a:r>
-              <a:rPr lang="pt-BR" sz="3400" b="0" i="0" u="none" strike="noStrike" cap="none" dirty="0" err="1">
-                <a:solidFill>
-                  <a:srgbClr val="000000"/>
-                </a:solidFill>
-                <a:latin typeface="Arial"/>
-                <a:ea typeface="Arial"/>
-                <a:cs typeface="Arial"/>
-                <a:sym typeface="Arial"/>
-              </a:rPr>
-              <a:t>SQLAlchemy</a:t>
-            </a:r>
-            <a:endParaRPr lang="pt-BR" sz="3400" b="0" i="0" u="none" strike="noStrike" cap="none" dirty="0">
-              <a:solidFill>
-                <a:srgbClr val="000000"/>
-              </a:solidFill>
-              <a:latin typeface="Arial"/>
-              <a:ea typeface="Arial"/>
-              <a:cs typeface="Arial"/>
-              <a:sym typeface="Arial"/>
-            </a:endParaRPr>
-          </a:p>
-          <a:p>
-            <a:pPr marL="457200" marR="0" lvl="0" indent="-457200" algn="just" rtl="0">
-              <a:lnSpc>
-                <a:spcPct val="140000"/>
-              </a:lnSpc>
-              <a:spcBef>
-                <a:spcPts val="0"/>
-              </a:spcBef>
-              <a:spcAft>
-                <a:spcPts val="0"/>
-              </a:spcAft>
-              <a:buClr>
-                <a:srgbClr val="000000"/>
-              </a:buClr>
-              <a:buSzPts val="3430"/>
-              <a:buFont typeface="Arial" panose="020B0604020202020204" pitchFamily="34" charset="0"/>
-              <a:buChar char="•"/>
-            </a:pPr>
-            <a:r>
-              <a:rPr lang="pt-BR" sz="3400" dirty="0"/>
               <a:t>Docker</a:t>
             </a:r>
-            <a:endParaRPr sz="3400" b="0" i="0" u="none" strike="noStrike" cap="none" dirty="0">
+            <a:endParaRPr sz="3430" b="0" i="0" u="none" strike="noStrike" cap="none" dirty="0">
               <a:solidFill>
                 <a:srgbClr val="000000"/>
               </a:solidFill>
-              <a:latin typeface="Arial"/>
-              <a:ea typeface="Arial"/>
-              <a:cs typeface="Arial"/>
+              <a:latin typeface="Open Sans" panose="020B0606030504020204" pitchFamily="34" charset="0"/>
+              <a:ea typeface="Open Sans" panose="020B0606030504020204" pitchFamily="34" charset="0"/>
+              <a:cs typeface="Open Sans" panose="020B0606030504020204" pitchFamily="34" charset="0"/>
               <a:sym typeface="Arial"/>
             </a:endParaRPr>
           </a:p>
         </p:txBody>
       </p:sp>
+      <p:pic>
+        <p:nvPicPr>
+          <p:cNvPr id="1026" name="Picture 2" descr="GitHub - lgf196/vite-react-cil: 一个用vite构建的react脚手架（A react scaffold built  with vite） · GitHub">
+            <a:extLst>
+              <a:ext uri="{FF2B5EF4-FFF2-40B4-BE49-F238E27FC236}">
+                <a16:creationId xmlns:a16="http://schemas.microsoft.com/office/drawing/2014/main" id="{3319042A-6658-44D6-9718-45B99135791C}"/>
+              </a:ext>
+            </a:extLst>
+          </p:cNvPr>
+          <p:cNvPicPr>
+            <a:picLocks noChangeAspect="1" noChangeArrowheads="1"/>
+          </p:cNvPicPr>
+          <p:nvPr/>
+        </p:nvPicPr>
+        <p:blipFill>
+          <a:blip r:embed="rId7">
+            <a:extLst>
+              <a:ext uri="{28A0092B-C50C-407E-A947-70E740481C1C}">
+                <a14:useLocalDpi xmlns:a14="http://schemas.microsoft.com/office/drawing/2010/main" val="0"/>
+              </a:ext>
+            </a:extLst>
+          </a:blip>
+          <a:srcRect/>
+          <a:stretch>
+            <a:fillRect/>
+          </a:stretch>
+        </p:blipFill>
+        <p:spPr bwMode="auto">
+          <a:xfrm>
+            <a:off x="1740992" y="34063671"/>
+            <a:ext cx="525454" cy="517765"/>
+          </a:xfrm>
+          <a:prstGeom prst="rect">
+            <a:avLst/>
+          </a:prstGeom>
+          <a:noFill/>
+          <a:extLst>
+            <a:ext uri="{909E8E84-426E-40DD-AFC4-6F175D3DCCD1}">
+              <a14:hiddenFill xmlns:a14="http://schemas.microsoft.com/office/drawing/2010/main">
+                <a:solidFill>
+                  <a:srgbClr val="FFFFFF"/>
+                </a:solidFill>
+              </a14:hiddenFill>
+            </a:ext>
+          </a:extLst>
+        </p:spPr>
+      </p:pic>
+      <p:pic>
+        <p:nvPicPr>
+          <p:cNvPr id="1028" name="Picture 4">
+            <a:extLst>
+              <a:ext uri="{FF2B5EF4-FFF2-40B4-BE49-F238E27FC236}">
+                <a16:creationId xmlns:a16="http://schemas.microsoft.com/office/drawing/2014/main" id="{67D8D6BB-65A2-D22C-3940-37456BF79734}"/>
+              </a:ext>
+            </a:extLst>
+          </p:cNvPr>
+          <p:cNvPicPr>
+            <a:picLocks noChangeAspect="1" noChangeArrowheads="1"/>
+          </p:cNvPicPr>
+          <p:nvPr/>
+        </p:nvPicPr>
+        <p:blipFill>
+          <a:blip r:embed="rId8">
+            <a:extLst>
+              <a:ext uri="{28A0092B-C50C-407E-A947-70E740481C1C}">
+                <a14:useLocalDpi xmlns:a14="http://schemas.microsoft.com/office/drawing/2010/main" val="0"/>
+              </a:ext>
+            </a:extLst>
+          </a:blip>
+          <a:srcRect/>
+          <a:stretch>
+            <a:fillRect/>
+          </a:stretch>
+        </p:blipFill>
+        <p:spPr bwMode="auto">
+          <a:xfrm>
+            <a:off x="1761695" y="34792106"/>
+            <a:ext cx="525454" cy="525454"/>
+          </a:xfrm>
+          <a:prstGeom prst="rect">
+            <a:avLst/>
+          </a:prstGeom>
+          <a:noFill/>
+          <a:extLst>
+            <a:ext uri="{909E8E84-426E-40DD-AFC4-6F175D3DCCD1}">
+              <a14:hiddenFill xmlns:a14="http://schemas.microsoft.com/office/drawing/2010/main">
+                <a:solidFill>
+                  <a:srgbClr val="FFFFFF"/>
+                </a:solidFill>
+              </a14:hiddenFill>
+            </a:ext>
+          </a:extLst>
+        </p:spPr>
+      </p:pic>
+      <p:pic>
+        <p:nvPicPr>
+          <p:cNvPr id="1030" name="Picture 6" descr="Integrate Label Studio with ZenML - Data Annotator Integrations">
+            <a:extLst>
+              <a:ext uri="{FF2B5EF4-FFF2-40B4-BE49-F238E27FC236}">
+                <a16:creationId xmlns:a16="http://schemas.microsoft.com/office/drawing/2014/main" id="{12C91F9D-EC2D-82E1-098A-E593DD4CF103}"/>
+              </a:ext>
+            </a:extLst>
+          </p:cNvPr>
+          <p:cNvPicPr>
+            <a:picLocks noChangeAspect="1" noChangeArrowheads="1"/>
+          </p:cNvPicPr>
+          <p:nvPr/>
+        </p:nvPicPr>
+        <p:blipFill>
+          <a:blip r:embed="rId9">
+            <a:extLst>
+              <a:ext uri="{28A0092B-C50C-407E-A947-70E740481C1C}">
+                <a14:useLocalDpi xmlns:a14="http://schemas.microsoft.com/office/drawing/2010/main" val="0"/>
+              </a:ext>
+            </a:extLst>
+          </a:blip>
+          <a:srcRect/>
+          <a:stretch>
+            <a:fillRect/>
+          </a:stretch>
+        </p:blipFill>
+        <p:spPr bwMode="auto">
+          <a:xfrm>
+            <a:off x="1708513" y="35525817"/>
+            <a:ext cx="590411" cy="590411"/>
+          </a:xfrm>
+          <a:prstGeom prst="rect">
+            <a:avLst/>
+          </a:prstGeom>
+          <a:noFill/>
+          <a:extLst>
+            <a:ext uri="{909E8E84-426E-40DD-AFC4-6F175D3DCCD1}">
+              <a14:hiddenFill xmlns:a14="http://schemas.microsoft.com/office/drawing/2010/main">
+                <a:solidFill>
+                  <a:srgbClr val="FFFFFF"/>
+                </a:solidFill>
+              </a14:hiddenFill>
+            </a:ext>
+          </a:extLst>
+        </p:spPr>
+      </p:pic>
+      <p:sp>
+        <p:nvSpPr>
+          <p:cNvPr id="2" name="AutoShape 8" descr="ECharts非官方镜像/echarts">
+            <a:extLst>
+              <a:ext uri="{FF2B5EF4-FFF2-40B4-BE49-F238E27FC236}">
+                <a16:creationId xmlns:a16="http://schemas.microsoft.com/office/drawing/2014/main" id="{0FDEE8A7-9808-EE2C-85C2-4147F01A72B4}"/>
+              </a:ext>
+            </a:extLst>
+          </p:cNvPr>
+          <p:cNvSpPr>
+            <a:spLocks noChangeAspect="1" noChangeArrowheads="1"/>
+          </p:cNvSpPr>
+          <p:nvPr/>
+        </p:nvSpPr>
+        <p:spPr bwMode="auto">
+          <a:xfrm>
+            <a:off x="14247813" y="21447125"/>
+            <a:ext cx="304800" cy="304800"/>
+          </a:xfrm>
+          <a:prstGeom prst="rect">
+            <a:avLst/>
+          </a:prstGeom>
+          <a:noFill/>
+          <a:extLst>
+            <a:ext uri="{909E8E84-426E-40DD-AFC4-6F175D3DCCD1}">
+              <a14:hiddenFill xmlns:a14="http://schemas.microsoft.com/office/drawing/2010/main">
+                <a:solidFill>
+                  <a:srgbClr val="FFFFFF"/>
+                </a:solidFill>
+              </a14:hiddenFill>
+            </a:ext>
+          </a:extLst>
+        </p:spPr>
+        <p:txBody>
+          <a:bodyPr vert="horz" wrap="square" lIns="91440" tIns="45720" rIns="91440" bIns="45720" numCol="1" anchor="t" anchorCtr="0" compatLnSpc="1">
+            <a:prstTxWarp prst="textNoShape">
+              <a:avLst/>
+            </a:prstTxWarp>
+          </a:bodyPr>
+          <a:lstStyle/>
+          <a:p>
+            <a:endParaRPr lang="pt-BR"/>
+          </a:p>
+        </p:txBody>
+      </p:sp>
+      <p:pic>
+        <p:nvPicPr>
+          <p:cNvPr id="1034" name="Picture 10" descr="ECharts非官方镜像/echarts">
+            <a:extLst>
+              <a:ext uri="{FF2B5EF4-FFF2-40B4-BE49-F238E27FC236}">
+                <a16:creationId xmlns:a16="http://schemas.microsoft.com/office/drawing/2014/main" id="{AFA30D21-FF7E-68E0-3D26-A942CEF5EF50}"/>
+              </a:ext>
+            </a:extLst>
+          </p:cNvPr>
+          <p:cNvPicPr>
+            <a:picLocks noChangeAspect="1" noChangeArrowheads="1"/>
+          </p:cNvPicPr>
+          <p:nvPr/>
+        </p:nvPicPr>
+        <p:blipFill>
+          <a:blip r:embed="rId10">
+            <a:extLst>
+              <a:ext uri="{28A0092B-C50C-407E-A947-70E740481C1C}">
+                <a14:useLocalDpi xmlns:a14="http://schemas.microsoft.com/office/drawing/2010/main" val="0"/>
+              </a:ext>
+            </a:extLst>
+          </a:blip>
+          <a:srcRect/>
+          <a:stretch>
+            <a:fillRect/>
+          </a:stretch>
+        </p:blipFill>
+        <p:spPr bwMode="auto">
+          <a:xfrm>
+            <a:off x="1773530" y="36312250"/>
+            <a:ext cx="460375" cy="460375"/>
+          </a:xfrm>
+          <a:prstGeom prst="rect">
+            <a:avLst/>
+          </a:prstGeom>
+          <a:noFill/>
+          <a:extLst>
+            <a:ext uri="{909E8E84-426E-40DD-AFC4-6F175D3DCCD1}">
+              <a14:hiddenFill xmlns:a14="http://schemas.microsoft.com/office/drawing/2010/main">
+                <a:solidFill>
+                  <a:srgbClr val="FFFFFF"/>
+                </a:solidFill>
+              </a14:hiddenFill>
+            </a:ext>
+          </a:extLst>
+        </p:spPr>
+      </p:pic>
+      <p:pic>
+        <p:nvPicPr>
+          <p:cNvPr id="1036" name="Picture 12" descr="Docker - ícones de marcas e logotipos grátis">
+            <a:extLst>
+              <a:ext uri="{FF2B5EF4-FFF2-40B4-BE49-F238E27FC236}">
+                <a16:creationId xmlns:a16="http://schemas.microsoft.com/office/drawing/2014/main" id="{84E458CE-D7AC-5193-F82A-B87EF017AA45}"/>
+              </a:ext>
+            </a:extLst>
+          </p:cNvPr>
+          <p:cNvPicPr>
+            <a:picLocks noChangeAspect="1" noChangeArrowheads="1"/>
+          </p:cNvPicPr>
+          <p:nvPr/>
+        </p:nvPicPr>
+        <p:blipFill>
+          <a:blip r:embed="rId11">
+            <a:extLst>
+              <a:ext uri="{28A0092B-C50C-407E-A947-70E740481C1C}">
+                <a14:useLocalDpi xmlns:a14="http://schemas.microsoft.com/office/drawing/2010/main" val="0"/>
+              </a:ext>
+            </a:extLst>
+          </a:blip>
+          <a:srcRect/>
+          <a:stretch>
+            <a:fillRect/>
+          </a:stretch>
+        </p:blipFill>
+        <p:spPr bwMode="auto">
+          <a:xfrm>
+            <a:off x="6513989" y="35541799"/>
+            <a:ext cx="513418" cy="513418"/>
+          </a:xfrm>
+          <a:prstGeom prst="rect">
+            <a:avLst/>
+          </a:prstGeom>
+          <a:noFill/>
+          <a:extLst>
+            <a:ext uri="{909E8E84-426E-40DD-AFC4-6F175D3DCCD1}">
+              <a14:hiddenFill xmlns:a14="http://schemas.microsoft.com/office/drawing/2010/main">
+                <a:solidFill>
+                  <a:srgbClr val="FFFFFF"/>
+                </a:solidFill>
+              </a14:hiddenFill>
+            </a:ext>
+          </a:extLst>
+        </p:spPr>
+      </p:pic>
+      <p:pic>
+        <p:nvPicPr>
+          <p:cNvPr id="1042" name="Picture 18">
+            <a:extLst>
+              <a:ext uri="{FF2B5EF4-FFF2-40B4-BE49-F238E27FC236}">
+                <a16:creationId xmlns:a16="http://schemas.microsoft.com/office/drawing/2014/main" id="{91C4AFA4-C165-6CED-9D5B-FE369B4984F0}"/>
+              </a:ext>
+            </a:extLst>
+          </p:cNvPr>
+          <p:cNvPicPr>
+            <a:picLocks noChangeAspect="1" noChangeArrowheads="1"/>
+          </p:cNvPicPr>
+          <p:nvPr/>
+        </p:nvPicPr>
+        <p:blipFill>
+          <a:blip r:embed="rId12">
+            <a:extLst>
+              <a:ext uri="{28A0092B-C50C-407E-A947-70E740481C1C}">
+                <a14:useLocalDpi xmlns:a14="http://schemas.microsoft.com/office/drawing/2010/main" val="0"/>
+              </a:ext>
+            </a:extLst>
+          </a:blip>
+          <a:srcRect/>
+          <a:stretch>
+            <a:fillRect/>
+          </a:stretch>
+        </p:blipFill>
+        <p:spPr bwMode="auto">
+          <a:xfrm>
+            <a:off x="6133216" y="34885881"/>
+            <a:ext cx="933005" cy="466503"/>
+          </a:xfrm>
+          <a:prstGeom prst="rect">
+            <a:avLst/>
+          </a:prstGeom>
+          <a:noFill/>
+          <a:extLst>
+            <a:ext uri="{909E8E84-426E-40DD-AFC4-6F175D3DCCD1}">
+              <a14:hiddenFill xmlns:a14="http://schemas.microsoft.com/office/drawing/2010/main">
+                <a:solidFill>
+                  <a:srgbClr val="FFFFFF"/>
+                </a:solidFill>
+              </a14:hiddenFill>
+            </a:ext>
+          </a:extLst>
+        </p:spPr>
+      </p:pic>
+      <p:pic>
+        <p:nvPicPr>
+          <p:cNvPr id="1046" name="Picture 22" descr="Fastapi icon - Free Download PNG &amp; SVG | Streamline">
+            <a:extLst>
+              <a:ext uri="{FF2B5EF4-FFF2-40B4-BE49-F238E27FC236}">
+                <a16:creationId xmlns:a16="http://schemas.microsoft.com/office/drawing/2014/main" id="{1768099F-CC8E-550D-2446-9DC9FF4F0B72}"/>
+              </a:ext>
+            </a:extLst>
+          </p:cNvPr>
+          <p:cNvPicPr>
+            <a:picLocks noChangeAspect="1" noChangeArrowheads="1"/>
+          </p:cNvPicPr>
+          <p:nvPr/>
+        </p:nvPicPr>
+        <p:blipFill>
+          <a:blip r:embed="rId13">
+            <a:extLst>
+              <a:ext uri="{28A0092B-C50C-407E-A947-70E740481C1C}">
+                <a14:useLocalDpi xmlns:a14="http://schemas.microsoft.com/office/drawing/2010/main" val="0"/>
+              </a:ext>
+            </a:extLst>
+          </a:blip>
+          <a:srcRect/>
+          <a:stretch>
+            <a:fillRect/>
+          </a:stretch>
+        </p:blipFill>
+        <p:spPr bwMode="auto">
+          <a:xfrm>
+            <a:off x="6527944" y="34107257"/>
+            <a:ext cx="488975" cy="488975"/>
+          </a:xfrm>
+          <a:prstGeom prst="rect">
+            <a:avLst/>
+          </a:prstGeom>
+          <a:noFill/>
+          <a:extLst>
+            <a:ext uri="{909E8E84-426E-40DD-AFC4-6F175D3DCCD1}">
+              <a14:hiddenFill xmlns:a14="http://schemas.microsoft.com/office/drawing/2010/main">
+                <a:solidFill>
+                  <a:srgbClr val="FFFFFF"/>
+                </a:solidFill>
+              </a14:hiddenFill>
+            </a:ext>
+          </a:extLst>
+        </p:spPr>
+      </p:pic>
+      <p:pic>
+        <p:nvPicPr>
+          <p:cNvPr id="7" name="Imagem 6">
+            <a:extLst>
+              <a:ext uri="{FF2B5EF4-FFF2-40B4-BE49-F238E27FC236}">
+                <a16:creationId xmlns:a16="http://schemas.microsoft.com/office/drawing/2014/main" id="{7B65A6CB-3FED-E158-97DE-34F1B6FA62C9}"/>
+              </a:ext>
+            </a:extLst>
+          </p:cNvPr>
+          <p:cNvPicPr>
+            <a:picLocks noChangeAspect="1"/>
+          </p:cNvPicPr>
+          <p:nvPr/>
+        </p:nvPicPr>
+        <p:blipFill>
+          <a:blip r:embed="rId14"/>
+          <a:stretch>
+            <a:fillRect/>
+          </a:stretch>
+        </p:blipFill>
+        <p:spPr>
+          <a:xfrm>
+            <a:off x="16248238" y="18941658"/>
+            <a:ext cx="9935962" cy="2810267"/>
+          </a:xfrm>
+          <a:prstGeom prst="rect">
+            <a:avLst/>
+          </a:prstGeom>
+        </p:spPr>
+      </p:pic>
+      <p:pic>
+        <p:nvPicPr>
+          <p:cNvPr id="9" name="Imagem 8">
+            <a:extLst>
+              <a:ext uri="{FF2B5EF4-FFF2-40B4-BE49-F238E27FC236}">
+                <a16:creationId xmlns:a16="http://schemas.microsoft.com/office/drawing/2014/main" id="{2451746D-C164-8E41-DA64-FBEEE2DF7CD1}"/>
+              </a:ext>
+            </a:extLst>
+          </p:cNvPr>
+          <p:cNvPicPr>
+            <a:picLocks noChangeAspect="1"/>
+          </p:cNvPicPr>
+          <p:nvPr/>
+        </p:nvPicPr>
+        <p:blipFill>
+          <a:blip r:embed="rId15"/>
+          <a:stretch>
+            <a:fillRect/>
+          </a:stretch>
+        </p:blipFill>
+        <p:spPr>
+          <a:xfrm>
+            <a:off x="16248237" y="15779591"/>
+            <a:ext cx="7791633" cy="3233475"/>
+          </a:xfrm>
+          <a:prstGeom prst="rect">
+            <a:avLst/>
+          </a:prstGeom>
+        </p:spPr>
+      </p:pic>
     </p:spTree>
   </p:cSld>
   <p:clrMapOvr>

--- a/Documentos/Banner_FECAP_CCOMP5_RivoTrio.pptx
+++ b/Documentos/Banner_FECAP_CCOMP5_RivoTrio.pptx
@@ -266,7 +266,7 @@
       </p15:sldGuideLst>
     </p:ext>
     <p:ext uri="GoogleSlidesCustomDataVersion2">
-      <go:slidesCustomData xmlns:go="http://customooxmlschemas.google.com/" xmlns:ahyp="http://schemas.microsoft.com/office/drawing/2018/hyperlinkcolor" xmlns:p15="http://schemas.microsoft.com/office/powerpoint/2012/main" xmlns:p14="http://schemas.microsoft.com/office/powerpoint/2010/main" xmlns:com="http://schemas.openxmlformats.org/drawingml/2006/compatibility" xmlns:pvml="urn:schemas-microsoft-com:office:powerpoint" xmlns:v="urn:schemas-microsoft-com:vml" xmlns:o="urn:schemas-microsoft-com:office:office" xmlns:dgm="http://schemas.openxmlformats.org/drawingml/2006/diagram" xmlns:c="http://schemas.openxmlformats.org/drawingml/2006/chart" xmlns:mv="urn:schemas-microsoft-com:mac:vml" xmlns:mc="http://schemas.openxmlformats.org/markup-compatibility/2006" xmlns="" r:id="rId12" roundtripDataSignature="AMtx7miHexfJ4GjhJ20xDvwvs2ulWXUQ1A=="/>
+      <go:slidesCustomData xmlns="" xmlns:mc="http://schemas.openxmlformats.org/markup-compatibility/2006" xmlns:mv="urn:schemas-microsoft-com:mac:vml" xmlns:c="http://schemas.openxmlformats.org/drawingml/2006/chart" xmlns:dgm="http://schemas.openxmlformats.org/drawingml/2006/diagram" xmlns:o="urn:schemas-microsoft-com:office:office" xmlns:v="urn:schemas-microsoft-com:vml" xmlns:pvml="urn:schemas-microsoft-com:office:powerpoint" xmlns:com="http://schemas.openxmlformats.org/drawingml/2006/compatibility" xmlns:p14="http://schemas.microsoft.com/office/powerpoint/2010/main" xmlns:p15="http://schemas.microsoft.com/office/powerpoint/2012/main" xmlns:ahyp="http://schemas.microsoft.com/office/drawing/2018/hyperlinkcolor" xmlns:go="http://customooxmlschemas.google.com/" r:id="rId12" roundtripDataSignature="AMtx7miHexfJ4GjhJ20xDvwvs2ulWXUQ1A=="/>
     </p:ext>
   </p:extLst>
 </p:presentation>
@@ -19107,10 +19107,10 @@
       </p:pic>
       <p:pic>
         <p:nvPicPr>
-          <p:cNvPr id="7" name="Imagem 6">
+          <p:cNvPr id="4" name="Imagem 3">
             <a:extLst>
               <a:ext uri="{FF2B5EF4-FFF2-40B4-BE49-F238E27FC236}">
-                <a16:creationId xmlns:a16="http://schemas.microsoft.com/office/drawing/2014/main" id="{7B65A6CB-3FED-E158-97DE-34F1B6FA62C9}"/>
+                <a16:creationId xmlns:a16="http://schemas.microsoft.com/office/drawing/2014/main" id="{D750FC00-4410-F127-0412-1D4C89BF0E3E}"/>
               </a:ext>
             </a:extLst>
           </p:cNvPr>
@@ -19127,38 +19127,8 @@
         </p:blipFill>
         <p:spPr>
           <a:xfrm>
-            <a:off x="16248238" y="18941658"/>
-            <a:ext cx="9935962" cy="2810267"/>
-          </a:xfrm>
-          <a:prstGeom prst="rect">
-            <a:avLst/>
-          </a:prstGeom>
-        </p:spPr>
-      </p:pic>
-      <p:pic>
-        <p:nvPicPr>
-          <p:cNvPr id="9" name="Imagem 8">
-            <a:extLst>
-              <a:ext uri="{FF2B5EF4-FFF2-40B4-BE49-F238E27FC236}">
-                <a16:creationId xmlns:a16="http://schemas.microsoft.com/office/drawing/2014/main" id="{2451746D-C164-8E41-DA64-FBEEE2DF7CD1}"/>
-              </a:ext>
-            </a:extLst>
-          </p:cNvPr>
-          <p:cNvPicPr>
-            <a:picLocks noChangeAspect="1"/>
-          </p:cNvPicPr>
-          <p:nvPr/>
-        </p:nvPicPr>
-        <p:blipFill>
-          <a:blip r:embed="rId15"/>
-          <a:stretch>
-            <a:fillRect/>
-          </a:stretch>
-        </p:blipFill>
-        <p:spPr>
-          <a:xfrm>
-            <a:off x="16248237" y="15779591"/>
-            <a:ext cx="7791633" cy="3233475"/>
+            <a:off x="15656201" y="16307447"/>
+            <a:ext cx="11769276" cy="5450646"/>
           </a:xfrm>
           <a:prstGeom prst="rect">
             <a:avLst/>
